--- a/neerlandais1/powerpoints/Verbindingswoorden_Coordination_et_subordination.pptx
+++ b/neerlandais1/powerpoints/Verbindingswoorden_Coordination_et_subordination.pptx
@@ -148,12 +148,12 @@
   <p:extLst>
     <p:ext uri="{521415D9-36F7-43E2-AB2F-B90AF26B5E84}">
       <p14:sectionLst xmlns:p14="http://schemas.microsoft.com/office/powerpoint/2010/main">
-        <p14:section name="Ouverture" id="{d516b0bb-f8b4-dc58-cac2-0be1d5c80f16}">
+        <p14:section name="Ouverture" id="{92c6d38c-76b2-621a-45b4-ce6779ab1304}">
           <p14:sldIdLst>
             <p14:sldId id="256"/>
           </p14:sldIdLst>
         </p14:section>
-        <p14:section name="Découvrir" id="{cb2f282f-124c-ba7e-9193-f89ece1405d1}">
+        <p14:section name="Découvrir" id="{349a5eab-ee3f-5efe-40b0-751392d284d5}">
           <p14:sldIdLst>
             <p14:sldId id="257"/>
             <p14:sldId id="258"/>
@@ -161,7 +161,7 @@
             <p14:sldId id="260"/>
           </p14:sldIdLst>
         </p14:section>
-        <p14:section name="Pont, tremplin, wagon" id="{7aeec47b-5b36-3b97-93ec-aa4e15d846a9}">
+        <p14:section name="Pont, tremplin, wagon" id="{902ea10a-35b4-0dfa-5b21-d19cbccee744}">
           <p14:sldIdLst>
             <p14:sldId id="261"/>
             <p14:sldId id="262"/>
@@ -169,7 +169,7 @@
             <p14:sldId id="264"/>
           </p14:sldIdLst>
         </p14:section>
-        <p14:section name="Les sens" id="{38da7a30-3111-b4b7-02af-51c06b63ff26}">
+        <p14:section name="Les sens" id="{c15c8fcd-5404-a227-53fd-549ba8bec431}">
           <p14:sldIdLst>
             <p14:sldId id="265"/>
             <p14:sldId id="266"/>
@@ -179,7 +179,7 @@
             <p14:sldId id="270"/>
           </p14:sldIdLst>
         </p14:section>
-        <p14:section name="Composer" id="{e05dc575-8514-106f-fa93-c320c2972441}">
+        <p14:section name="Composer" id="{0bae67c3-44e1-38db-7382-43bad2c54ce8}">
           <p14:sldIdLst>
             <p14:sldId id="271"/>
             <p14:sldId id="272"/>
@@ -188,7 +188,7 @@
             <p14:sldId id="275"/>
           </p14:sldIdLst>
         </p14:section>
-        <p14:section name="JIJ NU ! — Oefeningen" id="{b88bc13e-0ca2-5180-fb76-c6f9359127b6}">
+        <p14:section name="JIJ NU ! — Oefeningen" id="{f5c7d4d5-97a9-251d-c54a-86077bff7758}">
           <p14:sldIdLst>
             <p14:sldId id="276"/>
             <p14:sldId id="277"/>
@@ -213,7 +213,7 @@
             <p14:sldId id="296"/>
           </p14:sldIdLst>
         </p14:section>
-        <p14:section name="Clôture" id="{4bf01884-6433-87c7-f4e2-adb0a1044573}">
+        <p14:section name="Clôture" id="{61af24de-aa28-bc8e-1ad0-cc4f01e78e5a}">
           <p14:sldIdLst>
             <p14:sldId id="297"/>
           </p14:sldIdLst>

--- a/neerlandais1/powerpoints/Verbindingswoorden_Coordination_et_subordination.pptx
+++ b/neerlandais1/powerpoints/Verbindingswoorden_Coordination_et_subordination.pptx
@@ -148,12 +148,12 @@
   <p:extLst>
     <p:ext uri="{521415D9-36F7-43E2-AB2F-B90AF26B5E84}">
       <p14:sectionLst xmlns:p14="http://schemas.microsoft.com/office/powerpoint/2010/main">
-        <p14:section name="Ouverture" id="{92c6d38c-76b2-621a-45b4-ce6779ab1304}">
+        <p14:section name="Ouverture" id="{eb75c89f-19dc-bc2e-e83e-2d6c5e989ac0}">
           <p14:sldIdLst>
             <p14:sldId id="256"/>
           </p14:sldIdLst>
         </p14:section>
-        <p14:section name="Découvrir" id="{349a5eab-ee3f-5efe-40b0-751392d284d5}">
+        <p14:section name="Découvrir" id="{207897c5-14bb-fa4e-587d-03fd55607a37}">
           <p14:sldIdLst>
             <p14:sldId id="257"/>
             <p14:sldId id="258"/>
@@ -161,7 +161,7 @@
             <p14:sldId id="260"/>
           </p14:sldIdLst>
         </p14:section>
-        <p14:section name="Pont, tremplin, wagon" id="{902ea10a-35b4-0dfa-5b21-d19cbccee744}">
+        <p14:section name="Pont, tremplin, wagon" id="{93bce555-d720-bb6f-e5a2-7fdf460aa43d}">
           <p14:sldIdLst>
             <p14:sldId id="261"/>
             <p14:sldId id="262"/>
@@ -169,7 +169,7 @@
             <p14:sldId id="264"/>
           </p14:sldIdLst>
         </p14:section>
-        <p14:section name="Les sens" id="{c15c8fcd-5404-a227-53fd-549ba8bec431}">
+        <p14:section name="Les sens" id="{55b97c97-dcbf-b936-9785-5a9ac0ffd12f}">
           <p14:sldIdLst>
             <p14:sldId id="265"/>
             <p14:sldId id="266"/>
@@ -179,7 +179,7 @@
             <p14:sldId id="270"/>
           </p14:sldIdLst>
         </p14:section>
-        <p14:section name="Composer" id="{0bae67c3-44e1-38db-7382-43bad2c54ce8}">
+        <p14:section name="Composer" id="{fa6e8f2b-e094-f3cc-7b53-a8faef2e3976}">
           <p14:sldIdLst>
             <p14:sldId id="271"/>
             <p14:sldId id="272"/>
@@ -188,7 +188,7 @@
             <p14:sldId id="275"/>
           </p14:sldIdLst>
         </p14:section>
-        <p14:section name="JIJ NU ! — Oefeningen" id="{f5c7d4d5-97a9-251d-c54a-86077bff7758}">
+        <p14:section name="JIJ NU ! — Oefeningen" id="{7354f6bb-b434-7c3c-5e74-c20df2b3741e}">
           <p14:sldIdLst>
             <p14:sldId id="276"/>
             <p14:sldId id="277"/>
@@ -213,7 +213,7 @@
             <p14:sldId id="296"/>
           </p14:sldIdLst>
         </p14:section>
-        <p14:section name="Clôture" id="{61af24de-aa28-bc8e-1ad0-cc4f01e78e5a}">
+        <p14:section name="Clôture" id="{c61d48b6-a29f-ecf2-b6a2-61d923160ac6}">
           <p14:sldIdLst>
             <p14:sldId id="297"/>
           </p14:sldIdLst>
